--- a/將天敞開(崇拜版).pptx
+++ b/將天敞開(崇拜版).pptx
@@ -168,10 +168,9 @@
           <a:lstStyle/>
           <a:p>
             <a:r>
-              <a:rPr lang="zh-TW" altLang="en-US" smtClean="0"/>
+              <a:rPr lang="zh-TW" altLang="en-US"/>
               <a:t>按一下以編輯母片標題樣式</a:t>
             </a:r>
-            <a:endParaRPr lang="zh-TW" altLang="en-US"/>
           </a:p>
         </p:txBody>
       </p:sp>
@@ -287,10 +286,9 @@
           </a:lstStyle>
           <a:p>
             <a:r>
-              <a:rPr lang="zh-TW" altLang="en-US" smtClean="0"/>
+              <a:rPr lang="zh-TW" altLang="en-US"/>
               <a:t>按一下以編輯母片副標題樣式</a:t>
             </a:r>
-            <a:endParaRPr lang="zh-TW" altLang="en-US"/>
           </a:p>
         </p:txBody>
       </p:sp>
@@ -311,7 +309,7 @@
           <a:p>
             <a:fld id="{5F26EBDC-56AC-4702-A4F8-17F9FEC4370F}" type="datetimeFigureOut">
               <a:rPr lang="zh-TW" altLang="en-US" smtClean="0"/>
-              <a:t>2022/3/5</a:t>
+              <a:t>2024/10/19</a:t>
             </a:fld>
             <a:endParaRPr lang="zh-TW" altLang="en-US"/>
           </a:p>
@@ -400,10 +398,9 @@
           <a:lstStyle/>
           <a:p>
             <a:r>
-              <a:rPr lang="zh-TW" altLang="en-US" smtClean="0"/>
+              <a:rPr lang="zh-TW" altLang="en-US"/>
               <a:t>按一下以編輯母片標題樣式</a:t>
             </a:r>
-            <a:endParaRPr lang="zh-TW" altLang="en-US"/>
           </a:p>
         </p:txBody>
       </p:sp>
@@ -424,38 +421,37 @@
           <a:p>
             <a:pPr lvl="0"/>
             <a:r>
-              <a:rPr lang="zh-TW" altLang="en-US" smtClean="0"/>
+              <a:rPr lang="zh-TW" altLang="en-US"/>
               <a:t>按一下以編輯母片文字樣式</a:t>
             </a:r>
           </a:p>
           <a:p>
             <a:pPr lvl="1"/>
             <a:r>
-              <a:rPr lang="zh-TW" altLang="en-US" smtClean="0"/>
+              <a:rPr lang="zh-TW" altLang="en-US"/>
               <a:t>第二層</a:t>
             </a:r>
           </a:p>
           <a:p>
             <a:pPr lvl="2"/>
             <a:r>
-              <a:rPr lang="zh-TW" altLang="en-US" smtClean="0"/>
+              <a:rPr lang="zh-TW" altLang="en-US"/>
               <a:t>第三層</a:t>
             </a:r>
           </a:p>
           <a:p>
             <a:pPr lvl="3"/>
             <a:r>
-              <a:rPr lang="zh-TW" altLang="en-US" smtClean="0"/>
+              <a:rPr lang="zh-TW" altLang="en-US"/>
               <a:t>第四層</a:t>
             </a:r>
           </a:p>
           <a:p>
             <a:pPr lvl="4"/>
             <a:r>
-              <a:rPr lang="zh-TW" altLang="en-US" smtClean="0"/>
+              <a:rPr lang="zh-TW" altLang="en-US"/>
               <a:t>第五層</a:t>
             </a:r>
-            <a:endParaRPr lang="zh-TW" altLang="en-US"/>
           </a:p>
         </p:txBody>
       </p:sp>
@@ -476,7 +472,7 @@
           <a:p>
             <a:fld id="{5F26EBDC-56AC-4702-A4F8-17F9FEC4370F}" type="datetimeFigureOut">
               <a:rPr lang="zh-TW" altLang="en-US" smtClean="0"/>
-              <a:t>2022/3/5</a:t>
+              <a:t>2024/10/19</a:t>
             </a:fld>
             <a:endParaRPr lang="zh-TW" altLang="en-US"/>
           </a:p>
@@ -570,10 +566,9 @@
           <a:lstStyle/>
           <a:p>
             <a:r>
-              <a:rPr lang="zh-TW" altLang="en-US" smtClean="0"/>
+              <a:rPr lang="zh-TW" altLang="en-US"/>
               <a:t>按一下以編輯母片標題樣式</a:t>
             </a:r>
-            <a:endParaRPr lang="zh-TW" altLang="en-US"/>
           </a:p>
         </p:txBody>
       </p:sp>
@@ -599,38 +594,37 @@
           <a:p>
             <a:pPr lvl="0"/>
             <a:r>
-              <a:rPr lang="zh-TW" altLang="en-US" smtClean="0"/>
+              <a:rPr lang="zh-TW" altLang="en-US"/>
               <a:t>按一下以編輯母片文字樣式</a:t>
             </a:r>
           </a:p>
           <a:p>
             <a:pPr lvl="1"/>
             <a:r>
-              <a:rPr lang="zh-TW" altLang="en-US" smtClean="0"/>
+              <a:rPr lang="zh-TW" altLang="en-US"/>
               <a:t>第二層</a:t>
             </a:r>
           </a:p>
           <a:p>
             <a:pPr lvl="2"/>
             <a:r>
-              <a:rPr lang="zh-TW" altLang="en-US" smtClean="0"/>
+              <a:rPr lang="zh-TW" altLang="en-US"/>
               <a:t>第三層</a:t>
             </a:r>
           </a:p>
           <a:p>
             <a:pPr lvl="3"/>
             <a:r>
-              <a:rPr lang="zh-TW" altLang="en-US" smtClean="0"/>
+              <a:rPr lang="zh-TW" altLang="en-US"/>
               <a:t>第四層</a:t>
             </a:r>
           </a:p>
           <a:p>
             <a:pPr lvl="4"/>
             <a:r>
-              <a:rPr lang="zh-TW" altLang="en-US" smtClean="0"/>
+              <a:rPr lang="zh-TW" altLang="en-US"/>
               <a:t>第五層</a:t>
             </a:r>
-            <a:endParaRPr lang="zh-TW" altLang="en-US"/>
           </a:p>
         </p:txBody>
       </p:sp>
@@ -651,7 +645,7 @@
           <a:p>
             <a:fld id="{5F26EBDC-56AC-4702-A4F8-17F9FEC4370F}" type="datetimeFigureOut">
               <a:rPr lang="zh-TW" altLang="en-US" smtClean="0"/>
-              <a:t>2022/3/5</a:t>
+              <a:t>2024/10/19</a:t>
             </a:fld>
             <a:endParaRPr lang="zh-TW" altLang="en-US"/>
           </a:p>
@@ -740,10 +734,9 @@
           <a:lstStyle/>
           <a:p>
             <a:r>
-              <a:rPr lang="zh-TW" altLang="en-US" smtClean="0"/>
+              <a:rPr lang="zh-TW" altLang="en-US"/>
               <a:t>按一下以編輯母片標題樣式</a:t>
             </a:r>
-            <a:endParaRPr lang="zh-TW" altLang="en-US"/>
           </a:p>
         </p:txBody>
       </p:sp>
@@ -764,38 +757,37 @@
           <a:p>
             <a:pPr lvl="0"/>
             <a:r>
-              <a:rPr lang="zh-TW" altLang="en-US" smtClean="0"/>
+              <a:rPr lang="zh-TW" altLang="en-US"/>
               <a:t>按一下以編輯母片文字樣式</a:t>
             </a:r>
           </a:p>
           <a:p>
             <a:pPr lvl="1"/>
             <a:r>
-              <a:rPr lang="zh-TW" altLang="en-US" smtClean="0"/>
+              <a:rPr lang="zh-TW" altLang="en-US"/>
               <a:t>第二層</a:t>
             </a:r>
           </a:p>
           <a:p>
             <a:pPr lvl="2"/>
             <a:r>
-              <a:rPr lang="zh-TW" altLang="en-US" smtClean="0"/>
+              <a:rPr lang="zh-TW" altLang="en-US"/>
               <a:t>第三層</a:t>
             </a:r>
           </a:p>
           <a:p>
             <a:pPr lvl="3"/>
             <a:r>
-              <a:rPr lang="zh-TW" altLang="en-US" smtClean="0"/>
+              <a:rPr lang="zh-TW" altLang="en-US"/>
               <a:t>第四層</a:t>
             </a:r>
           </a:p>
           <a:p>
             <a:pPr lvl="4"/>
             <a:r>
-              <a:rPr lang="zh-TW" altLang="en-US" smtClean="0"/>
+              <a:rPr lang="zh-TW" altLang="en-US"/>
               <a:t>第五層</a:t>
             </a:r>
-            <a:endParaRPr lang="zh-TW" altLang="en-US"/>
           </a:p>
         </p:txBody>
       </p:sp>
@@ -816,7 +808,7 @@
           <a:p>
             <a:fld id="{5F26EBDC-56AC-4702-A4F8-17F9FEC4370F}" type="datetimeFigureOut">
               <a:rPr lang="zh-TW" altLang="en-US" smtClean="0"/>
-              <a:t>2022/3/5</a:t>
+              <a:t>2024/10/19</a:t>
             </a:fld>
             <a:endParaRPr lang="zh-TW" altLang="en-US"/>
           </a:p>
@@ -914,10 +906,9 @@
           </a:lstStyle>
           <a:p>
             <a:r>
-              <a:rPr lang="zh-TW" altLang="en-US" smtClean="0"/>
+              <a:rPr lang="zh-TW" altLang="en-US"/>
               <a:t>按一下以編輯母片標題樣式</a:t>
             </a:r>
-            <a:endParaRPr lang="zh-TW" altLang="en-US"/>
           </a:p>
         </p:txBody>
       </p:sp>
@@ -1034,7 +1025,7 @@
           <a:p>
             <a:pPr lvl="0"/>
             <a:r>
-              <a:rPr lang="zh-TW" altLang="en-US" smtClean="0"/>
+              <a:rPr lang="zh-TW" altLang="en-US"/>
               <a:t>按一下以編輯母片文字樣式</a:t>
             </a:r>
           </a:p>
@@ -1057,7 +1048,7 @@
           <a:p>
             <a:fld id="{5F26EBDC-56AC-4702-A4F8-17F9FEC4370F}" type="datetimeFigureOut">
               <a:rPr lang="zh-TW" altLang="en-US" smtClean="0"/>
-              <a:t>2022/3/5</a:t>
+              <a:t>2024/10/19</a:t>
             </a:fld>
             <a:endParaRPr lang="zh-TW" altLang="en-US"/>
           </a:p>
@@ -1146,10 +1137,9 @@
           <a:lstStyle/>
           <a:p>
             <a:r>
-              <a:rPr lang="zh-TW" altLang="en-US" smtClean="0"/>
+              <a:rPr lang="zh-TW" altLang="en-US"/>
               <a:t>按一下以編輯母片標題樣式</a:t>
             </a:r>
-            <a:endParaRPr lang="zh-TW" altLang="en-US"/>
           </a:p>
         </p:txBody>
       </p:sp>
@@ -1203,38 +1193,37 @@
           <a:p>
             <a:pPr lvl="0"/>
             <a:r>
-              <a:rPr lang="zh-TW" altLang="en-US" smtClean="0"/>
+              <a:rPr lang="zh-TW" altLang="en-US"/>
               <a:t>按一下以編輯母片文字樣式</a:t>
             </a:r>
           </a:p>
           <a:p>
             <a:pPr lvl="1"/>
             <a:r>
-              <a:rPr lang="zh-TW" altLang="en-US" smtClean="0"/>
+              <a:rPr lang="zh-TW" altLang="en-US"/>
               <a:t>第二層</a:t>
             </a:r>
           </a:p>
           <a:p>
             <a:pPr lvl="2"/>
             <a:r>
-              <a:rPr lang="zh-TW" altLang="en-US" smtClean="0"/>
+              <a:rPr lang="zh-TW" altLang="en-US"/>
               <a:t>第三層</a:t>
             </a:r>
           </a:p>
           <a:p>
             <a:pPr lvl="3"/>
             <a:r>
-              <a:rPr lang="zh-TW" altLang="en-US" smtClean="0"/>
+              <a:rPr lang="zh-TW" altLang="en-US"/>
               <a:t>第四層</a:t>
             </a:r>
           </a:p>
           <a:p>
             <a:pPr lvl="4"/>
             <a:r>
-              <a:rPr lang="zh-TW" altLang="en-US" smtClean="0"/>
+              <a:rPr lang="zh-TW" altLang="en-US"/>
               <a:t>第五層</a:t>
             </a:r>
-            <a:endParaRPr lang="zh-TW" altLang="en-US"/>
           </a:p>
         </p:txBody>
       </p:sp>
@@ -1288,38 +1277,37 @@
           <a:p>
             <a:pPr lvl="0"/>
             <a:r>
-              <a:rPr lang="zh-TW" altLang="en-US" smtClean="0"/>
+              <a:rPr lang="zh-TW" altLang="en-US"/>
               <a:t>按一下以編輯母片文字樣式</a:t>
             </a:r>
           </a:p>
           <a:p>
             <a:pPr lvl="1"/>
             <a:r>
-              <a:rPr lang="zh-TW" altLang="en-US" smtClean="0"/>
+              <a:rPr lang="zh-TW" altLang="en-US"/>
               <a:t>第二層</a:t>
             </a:r>
           </a:p>
           <a:p>
             <a:pPr lvl="2"/>
             <a:r>
-              <a:rPr lang="zh-TW" altLang="en-US" smtClean="0"/>
+              <a:rPr lang="zh-TW" altLang="en-US"/>
               <a:t>第三層</a:t>
             </a:r>
           </a:p>
           <a:p>
             <a:pPr lvl="3"/>
             <a:r>
-              <a:rPr lang="zh-TW" altLang="en-US" smtClean="0"/>
+              <a:rPr lang="zh-TW" altLang="en-US"/>
               <a:t>第四層</a:t>
             </a:r>
           </a:p>
           <a:p>
             <a:pPr lvl="4"/>
             <a:r>
-              <a:rPr lang="zh-TW" altLang="en-US" smtClean="0"/>
+              <a:rPr lang="zh-TW" altLang="en-US"/>
               <a:t>第五層</a:t>
             </a:r>
-            <a:endParaRPr lang="zh-TW" altLang="en-US"/>
           </a:p>
         </p:txBody>
       </p:sp>
@@ -1340,7 +1328,7 @@
           <a:p>
             <a:fld id="{5F26EBDC-56AC-4702-A4F8-17F9FEC4370F}" type="datetimeFigureOut">
               <a:rPr lang="zh-TW" altLang="en-US" smtClean="0"/>
-              <a:t>2022/3/5</a:t>
+              <a:t>2024/10/19</a:t>
             </a:fld>
             <a:endParaRPr lang="zh-TW" altLang="en-US"/>
           </a:p>
@@ -1433,10 +1421,9 @@
           </a:lstStyle>
           <a:p>
             <a:r>
-              <a:rPr lang="zh-TW" altLang="en-US" smtClean="0"/>
+              <a:rPr lang="zh-TW" altLang="en-US"/>
               <a:t>按一下以編輯母片標題樣式</a:t>
             </a:r>
-            <a:endParaRPr lang="zh-TW" altLang="en-US"/>
           </a:p>
         </p:txBody>
       </p:sp>
@@ -1499,7 +1486,7 @@
           <a:p>
             <a:pPr lvl="0"/>
             <a:r>
-              <a:rPr lang="zh-TW" altLang="en-US" smtClean="0"/>
+              <a:rPr lang="zh-TW" altLang="en-US"/>
               <a:t>按一下以編輯母片文字樣式</a:t>
             </a:r>
           </a:p>
@@ -1555,38 +1542,37 @@
           <a:p>
             <a:pPr lvl="0"/>
             <a:r>
-              <a:rPr lang="zh-TW" altLang="en-US" smtClean="0"/>
+              <a:rPr lang="zh-TW" altLang="en-US"/>
               <a:t>按一下以編輯母片文字樣式</a:t>
             </a:r>
           </a:p>
           <a:p>
             <a:pPr lvl="1"/>
             <a:r>
-              <a:rPr lang="zh-TW" altLang="en-US" smtClean="0"/>
+              <a:rPr lang="zh-TW" altLang="en-US"/>
               <a:t>第二層</a:t>
             </a:r>
           </a:p>
           <a:p>
             <a:pPr lvl="2"/>
             <a:r>
-              <a:rPr lang="zh-TW" altLang="en-US" smtClean="0"/>
+              <a:rPr lang="zh-TW" altLang="en-US"/>
               <a:t>第三層</a:t>
             </a:r>
           </a:p>
           <a:p>
             <a:pPr lvl="3"/>
             <a:r>
-              <a:rPr lang="zh-TW" altLang="en-US" smtClean="0"/>
+              <a:rPr lang="zh-TW" altLang="en-US"/>
               <a:t>第四層</a:t>
             </a:r>
           </a:p>
           <a:p>
             <a:pPr lvl="4"/>
             <a:r>
-              <a:rPr lang="zh-TW" altLang="en-US" smtClean="0"/>
+              <a:rPr lang="zh-TW" altLang="en-US"/>
               <a:t>第五層</a:t>
             </a:r>
-            <a:endParaRPr lang="zh-TW" altLang="en-US"/>
           </a:p>
         </p:txBody>
       </p:sp>
@@ -1649,7 +1635,7 @@
           <a:p>
             <a:pPr lvl="0"/>
             <a:r>
-              <a:rPr lang="zh-TW" altLang="en-US" smtClean="0"/>
+              <a:rPr lang="zh-TW" altLang="en-US"/>
               <a:t>按一下以編輯母片文字樣式</a:t>
             </a:r>
           </a:p>
@@ -1705,38 +1691,37 @@
           <a:p>
             <a:pPr lvl="0"/>
             <a:r>
-              <a:rPr lang="zh-TW" altLang="en-US" smtClean="0"/>
+              <a:rPr lang="zh-TW" altLang="en-US"/>
               <a:t>按一下以編輯母片文字樣式</a:t>
             </a:r>
           </a:p>
           <a:p>
             <a:pPr lvl="1"/>
             <a:r>
-              <a:rPr lang="zh-TW" altLang="en-US" smtClean="0"/>
+              <a:rPr lang="zh-TW" altLang="en-US"/>
               <a:t>第二層</a:t>
             </a:r>
           </a:p>
           <a:p>
             <a:pPr lvl="2"/>
             <a:r>
-              <a:rPr lang="zh-TW" altLang="en-US" smtClean="0"/>
+              <a:rPr lang="zh-TW" altLang="en-US"/>
               <a:t>第三層</a:t>
             </a:r>
           </a:p>
           <a:p>
             <a:pPr lvl="3"/>
             <a:r>
-              <a:rPr lang="zh-TW" altLang="en-US" smtClean="0"/>
+              <a:rPr lang="zh-TW" altLang="en-US"/>
               <a:t>第四層</a:t>
             </a:r>
           </a:p>
           <a:p>
             <a:pPr lvl="4"/>
             <a:r>
-              <a:rPr lang="zh-TW" altLang="en-US" smtClean="0"/>
+              <a:rPr lang="zh-TW" altLang="en-US"/>
               <a:t>第五層</a:t>
             </a:r>
-            <a:endParaRPr lang="zh-TW" altLang="en-US"/>
           </a:p>
         </p:txBody>
       </p:sp>
@@ -1757,7 +1742,7 @@
           <a:p>
             <a:fld id="{5F26EBDC-56AC-4702-A4F8-17F9FEC4370F}" type="datetimeFigureOut">
               <a:rPr lang="zh-TW" altLang="en-US" smtClean="0"/>
-              <a:t>2022/3/5</a:t>
+              <a:t>2024/10/19</a:t>
             </a:fld>
             <a:endParaRPr lang="zh-TW" altLang="en-US"/>
           </a:p>
@@ -1846,10 +1831,9 @@
           <a:lstStyle/>
           <a:p>
             <a:r>
-              <a:rPr lang="zh-TW" altLang="en-US" smtClean="0"/>
+              <a:rPr lang="zh-TW" altLang="en-US"/>
               <a:t>按一下以編輯母片標題樣式</a:t>
             </a:r>
-            <a:endParaRPr lang="zh-TW" altLang="en-US"/>
           </a:p>
         </p:txBody>
       </p:sp>
@@ -1870,7 +1854,7 @@
           <a:p>
             <a:fld id="{5F26EBDC-56AC-4702-A4F8-17F9FEC4370F}" type="datetimeFigureOut">
               <a:rPr lang="zh-TW" altLang="en-US" smtClean="0"/>
-              <a:t>2022/3/5</a:t>
+              <a:t>2024/10/19</a:t>
             </a:fld>
             <a:endParaRPr lang="zh-TW" altLang="en-US"/>
           </a:p>
@@ -1960,7 +1944,7 @@
           <a:p>
             <a:fld id="{5F26EBDC-56AC-4702-A4F8-17F9FEC4370F}" type="datetimeFigureOut">
               <a:rPr lang="zh-TW" altLang="en-US" smtClean="0"/>
-              <a:t>2022/3/5</a:t>
+              <a:t>2024/10/19</a:t>
             </a:fld>
             <a:endParaRPr lang="zh-TW" altLang="en-US"/>
           </a:p>
@@ -2058,10 +2042,9 @@
           </a:lstStyle>
           <a:p>
             <a:r>
-              <a:rPr lang="zh-TW" altLang="en-US" smtClean="0"/>
+              <a:rPr lang="zh-TW" altLang="en-US"/>
               <a:t>按一下以編輯母片標題樣式</a:t>
             </a:r>
-            <a:endParaRPr lang="zh-TW" altLang="en-US"/>
           </a:p>
         </p:txBody>
       </p:sp>
@@ -2115,38 +2098,37 @@
           <a:p>
             <a:pPr lvl="0"/>
             <a:r>
-              <a:rPr lang="zh-TW" altLang="en-US" smtClean="0"/>
+              <a:rPr lang="zh-TW" altLang="en-US"/>
               <a:t>按一下以編輯母片文字樣式</a:t>
             </a:r>
           </a:p>
           <a:p>
             <a:pPr lvl="1"/>
             <a:r>
-              <a:rPr lang="zh-TW" altLang="en-US" smtClean="0"/>
+              <a:rPr lang="zh-TW" altLang="en-US"/>
               <a:t>第二層</a:t>
             </a:r>
           </a:p>
           <a:p>
             <a:pPr lvl="2"/>
             <a:r>
-              <a:rPr lang="zh-TW" altLang="en-US" smtClean="0"/>
+              <a:rPr lang="zh-TW" altLang="en-US"/>
               <a:t>第三層</a:t>
             </a:r>
           </a:p>
           <a:p>
             <a:pPr lvl="3"/>
             <a:r>
-              <a:rPr lang="zh-TW" altLang="en-US" smtClean="0"/>
+              <a:rPr lang="zh-TW" altLang="en-US"/>
               <a:t>第四層</a:t>
             </a:r>
           </a:p>
           <a:p>
             <a:pPr lvl="4"/>
             <a:r>
-              <a:rPr lang="zh-TW" altLang="en-US" smtClean="0"/>
+              <a:rPr lang="zh-TW" altLang="en-US"/>
               <a:t>第五層</a:t>
             </a:r>
-            <a:endParaRPr lang="zh-TW" altLang="en-US"/>
           </a:p>
         </p:txBody>
       </p:sp>
@@ -2209,7 +2191,7 @@
           <a:p>
             <a:pPr lvl="0"/>
             <a:r>
-              <a:rPr lang="zh-TW" altLang="en-US" smtClean="0"/>
+              <a:rPr lang="zh-TW" altLang="en-US"/>
               <a:t>按一下以編輯母片文字樣式</a:t>
             </a:r>
           </a:p>
@@ -2232,7 +2214,7 @@
           <a:p>
             <a:fld id="{5F26EBDC-56AC-4702-A4F8-17F9FEC4370F}" type="datetimeFigureOut">
               <a:rPr lang="zh-TW" altLang="en-US" smtClean="0"/>
-              <a:t>2022/3/5</a:t>
+              <a:t>2024/10/19</a:t>
             </a:fld>
             <a:endParaRPr lang="zh-TW" altLang="en-US"/>
           </a:p>
@@ -2330,10 +2312,9 @@
           </a:lstStyle>
           <a:p>
             <a:r>
-              <a:rPr lang="zh-TW" altLang="en-US" smtClean="0"/>
+              <a:rPr lang="zh-TW" altLang="en-US"/>
               <a:t>按一下以編輯母片標題樣式</a:t>
             </a:r>
-            <a:endParaRPr lang="zh-TW" altLang="en-US"/>
           </a:p>
         </p:txBody>
       </p:sp>
@@ -2395,10 +2376,9 @@
           </a:lstStyle>
           <a:p>
             <a:r>
-              <a:rPr lang="zh-TW" altLang="en-US" smtClean="0"/>
+              <a:rPr lang="zh-TW" altLang="en-US"/>
               <a:t>按一下圖示以新增圖片</a:t>
             </a:r>
-            <a:endParaRPr lang="zh-TW" altLang="en-US"/>
           </a:p>
         </p:txBody>
       </p:sp>
@@ -2461,7 +2441,7 @@
           <a:p>
             <a:pPr lvl="0"/>
             <a:r>
-              <a:rPr lang="zh-TW" altLang="en-US" smtClean="0"/>
+              <a:rPr lang="zh-TW" altLang="en-US"/>
               <a:t>按一下以編輯母片文字樣式</a:t>
             </a:r>
           </a:p>
@@ -2484,7 +2464,7 @@
           <a:p>
             <a:fld id="{5F26EBDC-56AC-4702-A4F8-17F9FEC4370F}" type="datetimeFigureOut">
               <a:rPr lang="zh-TW" altLang="en-US" smtClean="0"/>
-              <a:t>2022/3/5</a:t>
+              <a:t>2024/10/19</a:t>
             </a:fld>
             <a:endParaRPr lang="zh-TW" altLang="en-US"/>
           </a:p>
@@ -2593,10 +2573,9 @@
           <a:lstStyle/>
           <a:p>
             <a:r>
-              <a:rPr lang="zh-TW" altLang="en-US" smtClean="0"/>
+              <a:rPr lang="zh-TW" altLang="en-US"/>
               <a:t>按一下以編輯母片標題樣式</a:t>
             </a:r>
-            <a:endParaRPr lang="zh-TW" altLang="en-US"/>
           </a:p>
         </p:txBody>
       </p:sp>
@@ -2627,38 +2606,37 @@
           <a:p>
             <a:pPr lvl="0"/>
             <a:r>
-              <a:rPr lang="zh-TW" altLang="en-US" smtClean="0"/>
+              <a:rPr lang="zh-TW" altLang="en-US"/>
               <a:t>按一下以編輯母片文字樣式</a:t>
             </a:r>
           </a:p>
           <a:p>
             <a:pPr lvl="1"/>
             <a:r>
-              <a:rPr lang="zh-TW" altLang="en-US" smtClean="0"/>
+              <a:rPr lang="zh-TW" altLang="en-US"/>
               <a:t>第二層</a:t>
             </a:r>
           </a:p>
           <a:p>
             <a:pPr lvl="2"/>
             <a:r>
-              <a:rPr lang="zh-TW" altLang="en-US" smtClean="0"/>
+              <a:rPr lang="zh-TW" altLang="en-US"/>
               <a:t>第三層</a:t>
             </a:r>
           </a:p>
           <a:p>
             <a:pPr lvl="3"/>
             <a:r>
-              <a:rPr lang="zh-TW" altLang="en-US" smtClean="0"/>
+              <a:rPr lang="zh-TW" altLang="en-US"/>
               <a:t>第四層</a:t>
             </a:r>
           </a:p>
           <a:p>
             <a:pPr lvl="4"/>
             <a:r>
-              <a:rPr lang="zh-TW" altLang="en-US" smtClean="0"/>
+              <a:rPr lang="zh-TW" altLang="en-US"/>
               <a:t>第五層</a:t>
             </a:r>
-            <a:endParaRPr lang="zh-TW" altLang="en-US"/>
           </a:p>
         </p:txBody>
       </p:sp>
@@ -2697,7 +2675,7 @@
           <a:p>
             <a:fld id="{5F26EBDC-56AC-4702-A4F8-17F9FEC4370F}" type="datetimeFigureOut">
               <a:rPr lang="zh-TW" altLang="en-US" smtClean="0"/>
-              <a:t>2022/3/5</a:t>
+              <a:t>2024/10/19</a:t>
             </a:fld>
             <a:endParaRPr lang="zh-TW" altLang="en-US"/>
           </a:p>
@@ -3090,7 +3068,7 @@
           <a:lstStyle/>
           <a:p>
             <a:r>
-              <a:rPr lang="zh-TW" altLang="en-US" sz="5400" b="1" i="1" dirty="0" smtClean="0">
+              <a:rPr lang="zh-TW" altLang="en-US" sz="5400" b="1" i="1" dirty="0">
                 <a:solidFill>
                   <a:srgbClr val="660033"/>
                 </a:solidFill>
@@ -3104,24 +3082,7 @@
                 <a:latin typeface="微軟正黑體" pitchFamily="34" charset="-120"/>
                 <a:ea typeface="微軟正黑體" pitchFamily="34" charset="-120"/>
               </a:rPr>
-              <a:t>將</a:t>
-            </a:r>
-            <a:r>
-              <a:rPr lang="zh-TW" altLang="en-US" sz="5400" b="1" i="1" dirty="0">
-                <a:solidFill>
-                  <a:srgbClr val="660033"/>
-                </a:solidFill>
-                <a:effectLst>
-                  <a:outerShdw blurRad="38100" dist="38100" dir="2700000" algn="tl">
-                    <a:srgbClr val="000000">
-                      <a:alpha val="43137"/>
-                    </a:srgbClr>
-                  </a:outerShdw>
-                </a:effectLst>
-                <a:latin typeface="微軟正黑體" pitchFamily="34" charset="-120"/>
-                <a:ea typeface="微軟正黑體" pitchFamily="34" charset="-120"/>
-              </a:rPr>
-              <a:t>天敞開</a:t>
+              <a:t>將天敞開</a:t>
             </a:r>
           </a:p>
         </p:txBody>
@@ -3192,34 +3153,24 @@
               <a:t>將天敞開  </a:t>
             </a:r>
             <a:r>
-              <a:rPr lang="zh-CN" altLang="en-US" sz="4800" b="1" dirty="0" smtClean="0">
+              <a:rPr lang="zh-CN" altLang="en-US" sz="4800" b="1" dirty="0">
                 <a:solidFill>
                   <a:srgbClr val="660033"/>
                 </a:solidFill>
                 <a:latin typeface="微軟正黑體" pitchFamily="34" charset="-120"/>
                 <a:ea typeface="微軟正黑體" pitchFamily="34" charset="-120"/>
               </a:rPr>
-              <a:t>袮</a:t>
-            </a:r>
-            <a:r>
-              <a:rPr lang="zh-TW" altLang="en-US" sz="4800" b="1" dirty="0" smtClean="0">
+              <a:t>祢</a:t>
+            </a:r>
+            <a:r>
+              <a:rPr lang="zh-TW" altLang="en-US" sz="4800" b="1" dirty="0">
                 <a:solidFill>
                   <a:srgbClr val="660033"/>
                 </a:solidFill>
                 <a:latin typeface="微軟正黑體" pitchFamily="34" charset="-120"/>
                 <a:ea typeface="微軟正黑體" pitchFamily="34" charset="-120"/>
               </a:rPr>
-              <a:t>的</a:t>
-            </a:r>
-            <a:r>
-              <a:rPr lang="zh-TW" altLang="en-US" sz="4800" b="1" dirty="0">
-                <a:solidFill>
-                  <a:srgbClr val="660033"/>
-                </a:solidFill>
-                <a:latin typeface="微軟正黑體" pitchFamily="34" charset="-120"/>
-                <a:ea typeface="微軟正黑體" pitchFamily="34" charset="-120"/>
-              </a:rPr>
-              <a:t>榮耀降下來</a:t>
+              <a:t>的榮耀降下來</a:t>
             </a:r>
             <a:endParaRPr lang="en-US" altLang="zh-TW" sz="4800" b="1" dirty="0">
               <a:solidFill>
@@ -3241,47 +3192,27 @@
                 <a:latin typeface="微軟正黑體" pitchFamily="34" charset="-120"/>
                 <a:ea typeface="微軟正黑體" pitchFamily="34" charset="-120"/>
               </a:rPr>
-              <a:t>將天敞</a:t>
-            </a:r>
-            <a:r>
-              <a:rPr lang="zh-TW" altLang="en-US" sz="4800" b="1" dirty="0" smtClean="0">
+              <a:t>將天敞開  </a:t>
+            </a:r>
+            <a:r>
+              <a:rPr lang="zh-CN" altLang="en-US" sz="4800" b="1" dirty="0">
                 <a:solidFill>
                   <a:srgbClr val="660033"/>
                 </a:solidFill>
                 <a:latin typeface="微軟正黑體" pitchFamily="34" charset="-120"/>
                 <a:ea typeface="微軟正黑體" pitchFamily="34" charset="-120"/>
               </a:rPr>
-              <a:t>開  </a:t>
-            </a:r>
-            <a:r>
-              <a:rPr lang="zh-CN" altLang="en-US" sz="4800" b="1" dirty="0" smtClean="0">
+              <a:t>祢</a:t>
+            </a:r>
+            <a:r>
+              <a:rPr lang="zh-TW" altLang="en-US" sz="4800" b="1" dirty="0">
                 <a:solidFill>
                   <a:srgbClr val="660033"/>
                 </a:solidFill>
                 <a:latin typeface="微軟正黑體" pitchFamily="34" charset="-120"/>
                 <a:ea typeface="微軟正黑體" pitchFamily="34" charset="-120"/>
               </a:rPr>
-              <a:t>袮</a:t>
-            </a:r>
-            <a:r>
-              <a:rPr lang="zh-TW" altLang="en-US" sz="4800" b="1" dirty="0" smtClean="0">
-                <a:solidFill>
-                  <a:srgbClr val="660033"/>
-                </a:solidFill>
-                <a:latin typeface="微軟正黑體" pitchFamily="34" charset="-120"/>
-                <a:ea typeface="微軟正黑體" pitchFamily="34" charset="-120"/>
-              </a:rPr>
-              <a:t>的</a:t>
-            </a:r>
-            <a:r>
-              <a:rPr lang="zh-TW" altLang="en-US" sz="4800" b="1" dirty="0">
-                <a:solidFill>
-                  <a:srgbClr val="660033"/>
-                </a:solidFill>
-                <a:latin typeface="微軟正黑體" pitchFamily="34" charset="-120"/>
-                <a:ea typeface="微軟正黑體" pitchFamily="34" charset="-120"/>
-              </a:rPr>
-              <a:t>同在降下來</a:t>
+              <a:t>的同在降下來</a:t>
             </a:r>
             <a:endParaRPr lang="en-US" altLang="zh-TW" sz="4800" b="1" dirty="0">
               <a:solidFill>
@@ -3336,7 +3267,7 @@
                 <a:latin typeface="Microsoft JhengHei" panose="020B0604030504040204" pitchFamily="34" charset="-120"/>
                 <a:ea typeface="Microsoft JhengHei" panose="020B0604030504040204" pitchFamily="34" charset="-120"/>
               </a:rPr>
-              <a:t>正</a:t>
+              <a:t>正歌</a:t>
             </a:r>
             <a:r>
               <a:rPr lang="en-US" sz="3300" b="1" dirty="0">
@@ -3422,47 +3353,27 @@
                 <a:latin typeface="微軟正黑體" pitchFamily="34" charset="-120"/>
                 <a:ea typeface="微軟正黑體" pitchFamily="34" charset="-120"/>
               </a:rPr>
-              <a:t>將天敞</a:t>
-            </a:r>
-            <a:r>
-              <a:rPr lang="zh-TW" altLang="en-US" sz="4800" b="1" dirty="0" smtClean="0">
+              <a:t>將天敞開  </a:t>
+            </a:r>
+            <a:r>
+              <a:rPr lang="zh-CN" altLang="en-US" sz="4800" b="1" dirty="0">
                 <a:solidFill>
                   <a:srgbClr val="660033"/>
                 </a:solidFill>
                 <a:latin typeface="微軟正黑體" pitchFamily="34" charset="-120"/>
                 <a:ea typeface="微軟正黑體" pitchFamily="34" charset="-120"/>
               </a:rPr>
-              <a:t>開  </a:t>
-            </a:r>
-            <a:r>
-              <a:rPr lang="zh-CN" altLang="en-US" sz="4800" b="1" dirty="0" smtClean="0">
+              <a:t>祢</a:t>
+            </a:r>
+            <a:r>
+              <a:rPr lang="zh-TW" altLang="en-US" sz="4800" b="1" dirty="0">
                 <a:solidFill>
                   <a:srgbClr val="660033"/>
                 </a:solidFill>
                 <a:latin typeface="微軟正黑體" pitchFamily="34" charset="-120"/>
                 <a:ea typeface="微軟正黑體" pitchFamily="34" charset="-120"/>
               </a:rPr>
-              <a:t>袮</a:t>
-            </a:r>
-            <a:r>
-              <a:rPr lang="zh-TW" altLang="en-US" sz="4800" b="1" dirty="0" smtClean="0">
-                <a:solidFill>
-                  <a:srgbClr val="660033"/>
-                </a:solidFill>
-                <a:latin typeface="微軟正黑體" pitchFamily="34" charset="-120"/>
-                <a:ea typeface="微軟正黑體" pitchFamily="34" charset="-120"/>
-              </a:rPr>
-              <a:t>的</a:t>
-            </a:r>
-            <a:r>
-              <a:rPr lang="zh-TW" altLang="en-US" sz="4800" b="1" dirty="0">
-                <a:solidFill>
-                  <a:srgbClr val="660033"/>
-                </a:solidFill>
-                <a:latin typeface="微軟正黑體" pitchFamily="34" charset="-120"/>
-                <a:ea typeface="微軟正黑體" pitchFamily="34" charset="-120"/>
-              </a:rPr>
-              <a:t>榮耀降下來</a:t>
+              <a:t>的榮耀降下來</a:t>
             </a:r>
             <a:endParaRPr lang="en-US" altLang="zh-TW" sz="4800" b="1" dirty="0">
               <a:solidFill>
@@ -3484,47 +3395,27 @@
                 <a:latin typeface="微軟正黑體" pitchFamily="34" charset="-120"/>
                 <a:ea typeface="微軟正黑體" pitchFamily="34" charset="-120"/>
               </a:rPr>
-              <a:t>萬國讚</a:t>
-            </a:r>
-            <a:r>
-              <a:rPr lang="zh-TW" altLang="en-US" sz="4800" b="1" dirty="0" smtClean="0">
+              <a:t>萬國讚嘆</a:t>
+            </a:r>
+            <a:r>
+              <a:rPr lang="zh-CN" altLang="en-US" sz="4800" b="1" dirty="0">
                 <a:solidFill>
                   <a:srgbClr val="660033"/>
                 </a:solidFill>
                 <a:latin typeface="微軟正黑體" pitchFamily="34" charset="-120"/>
                 <a:ea typeface="微軟正黑體" pitchFamily="34" charset="-120"/>
               </a:rPr>
-              <a:t>嘆</a:t>
-            </a:r>
-            <a:r>
-              <a:rPr lang="zh-CN" altLang="en-US" sz="4800" b="1" dirty="0" smtClean="0">
+              <a:t>祢  祢</a:t>
+            </a:r>
+            <a:r>
+              <a:rPr lang="zh-TW" altLang="en-US" sz="4800" b="1" dirty="0">
                 <a:solidFill>
                   <a:srgbClr val="660033"/>
                 </a:solidFill>
                 <a:latin typeface="微軟正黑體" pitchFamily="34" charset="-120"/>
                 <a:ea typeface="微軟正黑體" pitchFamily="34" charset="-120"/>
               </a:rPr>
-              <a:t>袮  袮</a:t>
-            </a:r>
-            <a:r>
-              <a:rPr lang="zh-TW" altLang="en-US" sz="4800" b="1" dirty="0" smtClean="0">
-                <a:solidFill>
-                  <a:srgbClr val="660033"/>
-                </a:solidFill>
-                <a:latin typeface="微軟正黑體" pitchFamily="34" charset="-120"/>
-                <a:ea typeface="微軟正黑體" pitchFamily="34" charset="-120"/>
-              </a:rPr>
-              <a:t>是</a:t>
-            </a:r>
-            <a:r>
-              <a:rPr lang="zh-TW" altLang="en-US" sz="4800" b="1" dirty="0">
-                <a:solidFill>
-                  <a:srgbClr val="660033"/>
-                </a:solidFill>
-                <a:latin typeface="微軟正黑體" pitchFamily="34" charset="-120"/>
-                <a:ea typeface="微軟正黑體" pitchFamily="34" charset="-120"/>
-              </a:rPr>
-              <a:t>榮耀君王</a:t>
+              <a:t>是榮耀君王</a:t>
             </a:r>
           </a:p>
         </p:txBody>
@@ -3572,7 +3463,7 @@
                 <a:latin typeface="Microsoft JhengHei" panose="020B0604030504040204" pitchFamily="34" charset="-120"/>
                 <a:ea typeface="Microsoft JhengHei" panose="020B0604030504040204" pitchFamily="34" charset="-120"/>
               </a:rPr>
-              <a:t>正</a:t>
+              <a:t>正歌</a:t>
             </a:r>
             <a:r>
               <a:rPr lang="en-US" sz="3300" b="1" dirty="0">
@@ -3658,27 +3549,7 @@
                 <a:latin typeface="微軟正黑體" pitchFamily="34" charset="-120"/>
                 <a:ea typeface="微軟正黑體" pitchFamily="34" charset="-120"/>
               </a:rPr>
-              <a:t>天上地下  </a:t>
-            </a:r>
-            <a:r>
-              <a:rPr lang="zh-TW" altLang="en-US" sz="4800" b="1" dirty="0" smtClean="0">
-                <a:solidFill>
-                  <a:srgbClr val="660033"/>
-                </a:solidFill>
-                <a:latin typeface="微軟正黑體" pitchFamily="34" charset="-120"/>
-                <a:ea typeface="微軟正黑體" pitchFamily="34" charset="-120"/>
-              </a:rPr>
-              <a:t>合</a:t>
-            </a:r>
-            <a:r>
-              <a:rPr lang="zh-TW" altLang="en-US" sz="4800" b="1" dirty="0">
-                <a:solidFill>
-                  <a:srgbClr val="660033"/>
-                </a:solidFill>
-                <a:latin typeface="微軟正黑體" pitchFamily="34" charset="-120"/>
-                <a:ea typeface="微軟正黑體" pitchFamily="34" charset="-120"/>
-              </a:rPr>
-              <a:t>一敬拜</a:t>
+              <a:t>天上地下  合一敬拜</a:t>
             </a:r>
             <a:endParaRPr lang="en-US" altLang="zh-TW" sz="4800" b="1" dirty="0">
               <a:solidFill>
@@ -3725,7 +3596,7 @@
               <a:t>( </a:t>
             </a:r>
             <a:r>
-              <a:rPr lang="zh-CN" altLang="en-US" sz="3300" b="1" dirty="0" smtClean="0">
+              <a:rPr lang="zh-CN" altLang="en-US" sz="3300" b="1" dirty="0">
                 <a:solidFill>
                   <a:srgbClr val="660033"/>
                 </a:solidFill>
@@ -3733,10 +3604,10 @@
                 <a:latin typeface="Microsoft JhengHei" panose="020B0604030504040204" pitchFamily="34" charset="-120"/>
                 <a:ea typeface="Microsoft JhengHei" panose="020B0604030504040204" pitchFamily="34" charset="-120"/>
               </a:rPr>
-              <a:t>副</a:t>
-            </a:r>
-            <a:r>
-              <a:rPr lang="en-US" sz="3300" b="1" dirty="0" smtClean="0">
+              <a:t>副歌</a:t>
+            </a:r>
+            <a:r>
+              <a:rPr lang="en-US" sz="3300" b="1" dirty="0">
                 <a:solidFill>
                   <a:srgbClr val="660033"/>
                 </a:solidFill>
@@ -3744,18 +3615,7 @@
                 <a:latin typeface="Microsoft JhengHei" panose="020B0604030504040204" pitchFamily="34" charset="-120"/>
                 <a:ea typeface="Microsoft JhengHei" panose="020B0604030504040204" pitchFamily="34" charset="-120"/>
               </a:rPr>
-              <a:t> </a:t>
-            </a:r>
-            <a:r>
-              <a:rPr lang="en-US" sz="3300" b="1" dirty="0">
-                <a:solidFill>
-                  <a:srgbClr val="660033"/>
-                </a:solidFill>
-                <a:effectLst/>
-                <a:latin typeface="Microsoft JhengHei" panose="020B0604030504040204" pitchFamily="34" charset="-120"/>
-                <a:ea typeface="Microsoft JhengHei" panose="020B0604030504040204" pitchFamily="34" charset="-120"/>
-              </a:rPr>
-              <a:t>)</a:t>
+              <a:t> )</a:t>
             </a:r>
             <a:endParaRPr lang="vi-VN" sz="3300" b="1" dirty="0">
               <a:solidFill>
@@ -3852,27 +3712,17 @@
                 <a:latin typeface="微軟正黑體" pitchFamily="34" charset="-120"/>
                 <a:ea typeface="微軟正黑體" pitchFamily="34" charset="-120"/>
               </a:rPr>
-              <a:t>榮耀歸</a:t>
-            </a:r>
-            <a:r>
-              <a:rPr lang="zh-TW" altLang="en-US" sz="4800" b="1" dirty="0" smtClean="0">
+              <a:t>榮耀歸於</a:t>
+            </a:r>
+            <a:r>
+              <a:rPr lang="zh-CN" altLang="en-US" sz="4800" b="1" dirty="0">
                 <a:solidFill>
                   <a:srgbClr val="660033"/>
                 </a:solidFill>
                 <a:latin typeface="微軟正黑體" pitchFamily="34" charset="-120"/>
                 <a:ea typeface="微軟正黑體" pitchFamily="34" charset="-120"/>
               </a:rPr>
-              <a:t>於</a:t>
-            </a:r>
-            <a:r>
-              <a:rPr lang="zh-CN" altLang="en-US" sz="4800" b="1" dirty="0">
-                <a:solidFill>
-                  <a:srgbClr val="660033"/>
-                </a:solidFill>
-                <a:latin typeface="微軟正黑體" pitchFamily="34" charset="-120"/>
-                <a:ea typeface="微軟正黑體" pitchFamily="34" charset="-120"/>
-              </a:rPr>
-              <a:t>袮</a:t>
+              <a:t>祢</a:t>
             </a:r>
             <a:endParaRPr lang="en-US" altLang="zh-TW" sz="4800" b="1" dirty="0">
               <a:solidFill>
@@ -3919,7 +3769,7 @@
               <a:t>( </a:t>
             </a:r>
             <a:r>
-              <a:rPr lang="zh-CN" altLang="en-US" sz="3300" b="1" dirty="0" smtClean="0">
+              <a:rPr lang="zh-CN" altLang="en-US" sz="3300" b="1" dirty="0">
                 <a:solidFill>
                   <a:srgbClr val="660033"/>
                 </a:solidFill>
@@ -3927,10 +3777,10 @@
                 <a:latin typeface="Microsoft JhengHei" panose="020B0604030504040204" pitchFamily="34" charset="-120"/>
                 <a:ea typeface="Microsoft JhengHei" panose="020B0604030504040204" pitchFamily="34" charset="-120"/>
               </a:rPr>
-              <a:t>副</a:t>
-            </a:r>
-            <a:r>
-              <a:rPr lang="en-US" sz="3300" b="1" dirty="0" smtClean="0">
+              <a:t>副歌</a:t>
+            </a:r>
+            <a:r>
+              <a:rPr lang="en-US" sz="3300" b="1" dirty="0">
                 <a:solidFill>
                   <a:srgbClr val="660033"/>
                 </a:solidFill>
@@ -3938,18 +3788,7 @@
                 <a:latin typeface="Microsoft JhengHei" panose="020B0604030504040204" pitchFamily="34" charset="-120"/>
                 <a:ea typeface="Microsoft JhengHei" panose="020B0604030504040204" pitchFamily="34" charset="-120"/>
               </a:rPr>
-              <a:t> </a:t>
-            </a:r>
-            <a:r>
-              <a:rPr lang="en-US" sz="3300" b="1" dirty="0">
-                <a:solidFill>
-                  <a:srgbClr val="660033"/>
-                </a:solidFill>
-                <a:effectLst/>
-                <a:latin typeface="Microsoft JhengHei" panose="020B0604030504040204" pitchFamily="34" charset="-120"/>
-                <a:ea typeface="Microsoft JhengHei" panose="020B0604030504040204" pitchFamily="34" charset="-120"/>
-              </a:rPr>
-              <a:t>)</a:t>
+              <a:t> )</a:t>
             </a:r>
             <a:endParaRPr lang="vi-VN" sz="3300" b="1" dirty="0">
               <a:solidFill>
@@ -4024,27 +3863,7 @@
                 <a:latin typeface="微軟正黑體" pitchFamily="34" charset="-120"/>
                 <a:ea typeface="微軟正黑體" pitchFamily="34" charset="-120"/>
               </a:rPr>
-              <a:t>天上地下  </a:t>
-            </a:r>
-            <a:r>
-              <a:rPr lang="zh-TW" altLang="en-US" sz="4800" b="1" dirty="0" smtClean="0">
-                <a:solidFill>
-                  <a:srgbClr val="660033"/>
-                </a:solidFill>
-                <a:latin typeface="微軟正黑體" pitchFamily="34" charset="-120"/>
-                <a:ea typeface="微軟正黑體" pitchFamily="34" charset="-120"/>
-              </a:rPr>
-              <a:t>在</a:t>
-            </a:r>
-            <a:r>
-              <a:rPr lang="zh-TW" altLang="en-US" sz="4800" b="1" dirty="0">
-                <a:solidFill>
-                  <a:srgbClr val="660033"/>
-                </a:solidFill>
-                <a:latin typeface="微軟正黑體" pitchFamily="34" charset="-120"/>
-                <a:ea typeface="微軟正黑體" pitchFamily="34" charset="-120"/>
-              </a:rPr>
-              <a:t>永恆裡敬拜</a:t>
+              <a:t>天上地下  在永恆裡敬拜</a:t>
             </a:r>
             <a:endParaRPr lang="en-US" altLang="zh-TW" sz="4800" b="1" dirty="0">
               <a:solidFill>
@@ -4106,7 +3925,7 @@
               <a:t>( </a:t>
             </a:r>
             <a:r>
-              <a:rPr lang="zh-CN" altLang="en-US" sz="3300" b="1" dirty="0" smtClean="0">
+              <a:rPr lang="zh-CN" altLang="en-US" sz="3300" b="1" dirty="0">
                 <a:solidFill>
                   <a:srgbClr val="660033"/>
                 </a:solidFill>
@@ -4114,10 +3933,10 @@
                 <a:latin typeface="Microsoft JhengHei" panose="020B0604030504040204" pitchFamily="34" charset="-120"/>
                 <a:ea typeface="Microsoft JhengHei" panose="020B0604030504040204" pitchFamily="34" charset="-120"/>
               </a:rPr>
-              <a:t>副</a:t>
-            </a:r>
-            <a:r>
-              <a:rPr lang="en-US" sz="3300" b="1" dirty="0" smtClean="0">
+              <a:t>副歌</a:t>
+            </a:r>
+            <a:r>
+              <a:rPr lang="en-US" sz="3300" b="1" dirty="0">
                 <a:solidFill>
                   <a:srgbClr val="660033"/>
                 </a:solidFill>
@@ -4125,18 +3944,7 @@
                 <a:latin typeface="Microsoft JhengHei" panose="020B0604030504040204" pitchFamily="34" charset="-120"/>
                 <a:ea typeface="Microsoft JhengHei" panose="020B0604030504040204" pitchFamily="34" charset="-120"/>
               </a:rPr>
-              <a:t> </a:t>
-            </a:r>
-            <a:r>
-              <a:rPr lang="en-US" sz="3300" b="1" dirty="0">
-                <a:solidFill>
-                  <a:srgbClr val="660033"/>
-                </a:solidFill>
-                <a:effectLst/>
-                <a:latin typeface="Microsoft JhengHei" panose="020B0604030504040204" pitchFamily="34" charset="-120"/>
-                <a:ea typeface="Microsoft JhengHei" panose="020B0604030504040204" pitchFamily="34" charset="-120"/>
-              </a:rPr>
-              <a:t>)</a:t>
+              <a:t> )</a:t>
             </a:r>
             <a:endParaRPr lang="vi-VN" sz="3300" b="1" dirty="0">
               <a:solidFill>
@@ -4211,27 +4019,17 @@
                 <a:latin typeface="微軟正黑體" pitchFamily="34" charset="-120"/>
                 <a:ea typeface="微軟正黑體" pitchFamily="34" charset="-120"/>
               </a:rPr>
-              <a:t>神就在這裡  我們歡</a:t>
-            </a:r>
-            <a:r>
-              <a:rPr lang="zh-TW" altLang="en-US" sz="4800" b="1" dirty="0" smtClean="0">
+              <a:t>神就在這裡  我們歡迎</a:t>
+            </a:r>
+            <a:r>
+              <a:rPr lang="zh-CN" altLang="en-US" sz="4800" b="1" dirty="0">
                 <a:solidFill>
                   <a:srgbClr val="660033"/>
                 </a:solidFill>
                 <a:latin typeface="微軟正黑體" pitchFamily="34" charset="-120"/>
                 <a:ea typeface="微軟正黑體" pitchFamily="34" charset="-120"/>
               </a:rPr>
-              <a:t>迎</a:t>
-            </a:r>
-            <a:r>
-              <a:rPr lang="zh-CN" altLang="en-US" sz="4800" b="1" dirty="0">
-                <a:solidFill>
-                  <a:srgbClr val="660033"/>
-                </a:solidFill>
-                <a:latin typeface="微軟正黑體" pitchFamily="34" charset="-120"/>
-                <a:ea typeface="微軟正黑體" pitchFamily="34" charset="-120"/>
-              </a:rPr>
-              <a:t>袮</a:t>
+              <a:t>祢</a:t>
             </a:r>
             <a:endParaRPr lang="en-US" altLang="zh-TW" sz="4800" b="1" dirty="0">
               <a:solidFill>
@@ -4253,27 +4051,17 @@
                 <a:latin typeface="微軟正黑體" pitchFamily="34" charset="-120"/>
                 <a:ea typeface="微軟正黑體" pitchFamily="34" charset="-120"/>
               </a:rPr>
-              <a:t>讓一切焦點轉</a:t>
-            </a:r>
-            <a:r>
-              <a:rPr lang="zh-TW" altLang="en-US" sz="4800" b="1" dirty="0" smtClean="0">
+              <a:t>讓一切焦點轉向</a:t>
+            </a:r>
+            <a:r>
+              <a:rPr lang="zh-CN" altLang="en-US" sz="4800" b="1" dirty="0">
                 <a:solidFill>
                   <a:srgbClr val="660033"/>
                 </a:solidFill>
                 <a:latin typeface="微軟正黑體" pitchFamily="34" charset="-120"/>
                 <a:ea typeface="微軟正黑體" pitchFamily="34" charset="-120"/>
               </a:rPr>
-              <a:t>向</a:t>
-            </a:r>
-            <a:r>
-              <a:rPr lang="zh-CN" altLang="en-US" sz="4800" b="1" dirty="0">
-                <a:solidFill>
-                  <a:srgbClr val="660033"/>
-                </a:solidFill>
-                <a:latin typeface="微軟正黑體" pitchFamily="34" charset="-120"/>
-                <a:ea typeface="微軟正黑體" pitchFamily="34" charset="-120"/>
-              </a:rPr>
-              <a:t>袮</a:t>
+              <a:t>祢</a:t>
             </a:r>
             <a:endParaRPr lang="en-US" altLang="zh-TW" sz="4800" b="1" dirty="0">
               <a:solidFill>
@@ -4331,7 +4119,7 @@
               <a:t>橋</a:t>
             </a:r>
             <a:r>
-              <a:rPr lang="en-US" sz="3300" b="1" dirty="0" smtClean="0">
+              <a:rPr lang="en-US" sz="3300" b="1" dirty="0">
                 <a:solidFill>
                   <a:srgbClr val="660033"/>
                 </a:solidFill>
@@ -4339,18 +4127,7 @@
                 <a:latin typeface="Microsoft JhengHei" panose="020B0604030504040204" pitchFamily="34" charset="-120"/>
                 <a:ea typeface="Microsoft JhengHei" panose="020B0604030504040204" pitchFamily="34" charset="-120"/>
               </a:rPr>
-              <a:t> </a:t>
-            </a:r>
-            <a:r>
-              <a:rPr lang="en-US" sz="3300" b="1" dirty="0">
-                <a:solidFill>
-                  <a:srgbClr val="660033"/>
-                </a:solidFill>
-                <a:effectLst/>
-                <a:latin typeface="Microsoft JhengHei" panose="020B0604030504040204" pitchFamily="34" charset="-120"/>
-                <a:ea typeface="Microsoft JhengHei" panose="020B0604030504040204" pitchFamily="34" charset="-120"/>
-              </a:rPr>
-              <a:t>)</a:t>
+              <a:t> )</a:t>
             </a:r>
             <a:endParaRPr lang="vi-VN" sz="3300" b="1" dirty="0">
               <a:solidFill>
@@ -4425,27 +4202,17 @@
                 <a:latin typeface="微軟正黑體" pitchFamily="34" charset="-120"/>
                 <a:ea typeface="微軟正黑體" pitchFamily="34" charset="-120"/>
               </a:rPr>
-              <a:t>神就在這裡  我們歡</a:t>
-            </a:r>
-            <a:r>
-              <a:rPr lang="zh-TW" altLang="en-US" sz="4800" b="1" dirty="0" smtClean="0">
+              <a:t>神就在這裡  我們歡迎</a:t>
+            </a:r>
+            <a:r>
+              <a:rPr lang="zh-CN" altLang="en-US" sz="4800" b="1" dirty="0">
                 <a:solidFill>
                   <a:srgbClr val="660033"/>
                 </a:solidFill>
                 <a:latin typeface="微軟正黑體" pitchFamily="34" charset="-120"/>
                 <a:ea typeface="微軟正黑體" pitchFamily="34" charset="-120"/>
               </a:rPr>
-              <a:t>迎</a:t>
-            </a:r>
-            <a:r>
-              <a:rPr lang="zh-CN" altLang="en-US" sz="4800" b="1" dirty="0">
-                <a:solidFill>
-                  <a:srgbClr val="660033"/>
-                </a:solidFill>
-                <a:latin typeface="微軟正黑體" pitchFamily="34" charset="-120"/>
-                <a:ea typeface="微軟正黑體" pitchFamily="34" charset="-120"/>
-              </a:rPr>
-              <a:t>袮</a:t>
+              <a:t>祢</a:t>
             </a:r>
             <a:endParaRPr lang="en-US" altLang="zh-TW" sz="4800" b="1" dirty="0">
               <a:solidFill>
@@ -4518,7 +4285,7 @@
               <a:t>橋</a:t>
             </a:r>
             <a:r>
-              <a:rPr lang="en-US" sz="3300" b="1" dirty="0" smtClean="0">
+              <a:rPr lang="en-US" sz="3300" b="1" dirty="0">
                 <a:solidFill>
                   <a:srgbClr val="660033"/>
                 </a:solidFill>
@@ -4526,18 +4293,7 @@
                 <a:latin typeface="Microsoft JhengHei" panose="020B0604030504040204" pitchFamily="34" charset="-120"/>
                 <a:ea typeface="Microsoft JhengHei" panose="020B0604030504040204" pitchFamily="34" charset="-120"/>
               </a:rPr>
-              <a:t> </a:t>
-            </a:r>
-            <a:r>
-              <a:rPr lang="en-US" sz="3300" b="1" dirty="0">
-                <a:solidFill>
-                  <a:srgbClr val="660033"/>
-                </a:solidFill>
-                <a:effectLst/>
-                <a:latin typeface="Microsoft JhengHei" panose="020B0604030504040204" pitchFamily="34" charset="-120"/>
-                <a:ea typeface="Microsoft JhengHei" panose="020B0604030504040204" pitchFamily="34" charset="-120"/>
-              </a:rPr>
-              <a:t>)</a:t>
+              <a:t> )</a:t>
             </a:r>
             <a:endParaRPr lang="vi-VN" sz="3300" b="1" dirty="0">
               <a:solidFill>
